--- a/Schools_ML_Track/camp_2026/slides/ML/ML08.pptx
+++ b/Schools_ML_Track/camp_2026/slides/ML/ML08.pptx
@@ -129,7 +129,7 @@
   <p:extLst>
     <p:ext uri="{521415D9-36F7-43E2-AB2F-B90AF26B5E84}">
       <p14:sectionLst xmlns:p14="http://schemas.microsoft.com/office/powerpoint/2010/main">
-        <p14:section name="Opening" id="{747c19bf-bf81-5b12-69b5-20d1f4c653c9}">
+        <p14:section name="Opening" id="{7ced193d-66fa-49ea-1af5-f2518c6886b7}">
           <p14:sldIdLst>
             <p14:sldId id="256"/>
             <p14:sldId id="257"/>
@@ -141,7 +141,7 @@
             <p14:sldId id="263"/>
           </p14:sldIdLst>
         </p14:section>
-        <p14:section name="Block A" id="{34f4489f-d30a-be2d-ff16-9baeedeb25e3}">
+        <p14:section name="Block A" id="{39dbfb81-8b61-6fea-75e1-215f3c78e7f3}">
           <p14:sldIdLst>
             <p14:sldId id="264"/>
             <p14:sldId id="265"/>
@@ -151,15 +151,15 @@
             <p14:sldId id="270"/>
           </p14:sldIdLst>
         </p14:section>
-        <p14:section name="Break" id="{8ce0f0fe-b0f2-30bf-e54d-d4e9356694dd}">
+        <p14:section name="Break" id="{01bf607b-855d-48d7-e8d6-2a318417edf1}">
           <p14:sldIdLst>
             <p14:sldId id="268"/>
           </p14:sldIdLst>
         </p14:section>
-        <p14:section name="Block A" id="{e64bd31a-1016-174c-72c8-1ec49ea9f7ea}">
+        <p14:section name="Block A" id="{fdf3864b-b7d9-d2b3-cbe8-77e00fcdea8c}">
           <p14:sldIdLst/>
         </p14:section>
-        <p14:section name="Block B" id="{094ba155-7f55-e62f-c907-d7372b5f8f18}">
+        <p14:section name="Block B" id="{878d9754-9433-7370-f471-512d2fed686f}">
           <p14:sldIdLst>
             <p14:sldId id="271"/>
             <p14:sldId id="272"/>
@@ -168,7 +168,7 @@
             <p14:sldId id="275"/>
           </p14:sldIdLst>
         </p14:section>
-        <p14:section name="Make and close" id="{8b7a0276-b34a-a2c9-9309-5d1a8f330244}">
+        <p14:section name="Make and close" id="{a471200b-6e37-0ecd-30d1-df0ec2ca2ccf}">
           <p14:sldIdLst>
             <p14:sldId id="276"/>
             <p14:sldId id="277"/>

--- a/Schools_ML_Track/camp_2026/slides/ML/ML08.pptx
+++ b/Schools_ML_Track/camp_2026/slides/ML/ML08.pptx
@@ -129,7 +129,7 @@
   <p:extLst>
     <p:ext uri="{521415D9-36F7-43E2-AB2F-B90AF26B5E84}">
       <p14:sectionLst xmlns:p14="http://schemas.microsoft.com/office/powerpoint/2010/main">
-        <p14:section name="Opening" id="{7ced193d-66fa-49ea-1af5-f2518c6886b7}">
+        <p14:section name="Opening" id="{815b7a3b-9c9d-640f-21e0-62f414b34ecd}">
           <p14:sldIdLst>
             <p14:sldId id="256"/>
             <p14:sldId id="257"/>
@@ -141,7 +141,7 @@
             <p14:sldId id="263"/>
           </p14:sldIdLst>
         </p14:section>
-        <p14:section name="Block A" id="{39dbfb81-8b61-6fea-75e1-215f3c78e7f3}">
+        <p14:section name="Block A" id="{920a140d-5f25-61ee-47bf-a92cf1f9669b}">
           <p14:sldIdLst>
             <p14:sldId id="264"/>
             <p14:sldId id="265"/>
@@ -151,15 +151,15 @@
             <p14:sldId id="270"/>
           </p14:sldIdLst>
         </p14:section>
-        <p14:section name="Break" id="{01bf607b-855d-48d7-e8d6-2a318417edf1}">
+        <p14:section name="Break" id="{1655c415-1f10-5edf-53d6-0fe20b02b0a1}">
           <p14:sldIdLst>
             <p14:sldId id="268"/>
           </p14:sldIdLst>
         </p14:section>
-        <p14:section name="Block A" id="{fdf3864b-b7d9-d2b3-cbe8-77e00fcdea8c}">
+        <p14:section name="Block A" id="{092691ef-d5ca-e2c2-529e-4397cb206dfe}">
           <p14:sldIdLst/>
         </p14:section>
-        <p14:section name="Block B" id="{878d9754-9433-7370-f471-512d2fed686f}">
+        <p14:section name="Block B" id="{d7bd5d4d-13bd-aba1-e0e5-e07ac317e7e5}">
           <p14:sldIdLst>
             <p14:sldId id="271"/>
             <p14:sldId id="272"/>
@@ -168,7 +168,7 @@
             <p14:sldId id="275"/>
           </p14:sldIdLst>
         </p14:section>
-        <p14:section name="Make and close" id="{a471200b-6e37-0ecd-30d1-df0ec2ca2ccf}">
+        <p14:section name="Make and close" id="{68360e3d-754a-5c2b-f8be-b3dc3ef6946a}">
           <p14:sldIdLst>
             <p14:sldId id="276"/>
             <p14:sldId id="277"/>
@@ -3288,7 +3288,24 @@
                 <a:ea typeface="Lato" pitchFamily="34" charset="-122"/>
                 <a:cs typeface="Lato" pitchFamily="34" charset="-120"/>
               </a:rPr>
-              <a:t>Select, filter and calculate new columns</a:t>
+              <a:t>Select, filter and</a:t>
+            </a:r>
+            <a:endParaRPr lang="en-US" sz="5600" dirty="0"/>
+          </a:p>
+          <a:p>
+            <a:pPr algn="l" indent="0" marL="0">
+              <a:buNone/>
+            </a:pPr>
+            <a:r>
+              <a:rPr lang="en-US" sz="5600" b="1" dirty="0">
+                <a:solidFill>
+                  <a:srgbClr val="FFFFFF"/>
+                </a:solidFill>
+                <a:latin typeface="Lato" pitchFamily="34" charset="0"/>
+                <a:ea typeface="Lato" pitchFamily="34" charset="-122"/>
+                <a:cs typeface="Lato" pitchFamily="34" charset="-120"/>
+              </a:rPr>
+              <a:t>calculate new columns</a:t>
             </a:r>
             <a:endParaRPr lang="en-US" sz="5600" dirty="0"/>
           </a:p>
@@ -5744,433 +5761,40 @@
           </a:p>
         </p:txBody>
       </p:sp>
-      <p:sp>
-        <p:nvSpPr>
-          <p:cNvPr id="3" name="Shape 1"/>
-          <p:cNvSpPr/>
+      <p:pic>
+        <p:nvPicPr>
+          <p:cNvPr id="3" name="Image 0" descr="Look closely">    </p:cNvPr>
+          <p:cNvPicPr>
+            <a:picLocks noChangeAspect="1"/>
+          </p:cNvPicPr>
           <p:nvPr/>
-        </p:nvSpPr>
-        <p:spPr>
-          <a:xfrm>
-            <a:off x="7498080" y="1737360"/>
-            <a:ext cx="4023360" cy="2981452"/>
-          </a:xfrm>
-          <a:prstGeom prst="roundRect">
-            <a:avLst>
-              <a:gd name="adj" fmla="val 2454"/>
-            </a:avLst>
-          </a:prstGeom>
-          <a:solidFill>
-            <a:srgbClr val="111111"/>
-          </a:solidFill>
-          <a:ln/>
-        </p:spPr>
-      </p:sp>
-      <p:sp>
-        <p:nvSpPr>
-          <p:cNvPr id="4" name="Text 2"/>
+        </p:nvPicPr>
+        <p:blipFill>
+          <a:blip r:embed="rId1"/>
+          <a:stretch>
+            <a:fillRect/>
+          </a:stretch>
+        </p:blipFill>
+        <p:spPr>
+          <a:xfrm>
+            <a:off x="9875520" y="4480560"/>
+            <a:ext cx="1645920" cy="1645920"/>
+          </a:xfrm>
+          <a:prstGeom prst="rect">
+            <a:avLst/>
+          </a:prstGeom>
+        </p:spPr>
+      </p:pic>
+      <p:sp>
+        <p:nvSpPr>
+          <p:cNvPr id="4" name="Text 1"/>
           <p:cNvSpPr txBox="1"/>
           <p:nvPr/>
         </p:nvSpPr>
         <p:spPr>
           <a:xfrm>
-            <a:off x="7699248" y="1938528"/>
-            <a:ext cx="3621024" cy="2579116"/>
-          </a:xfrm>
-          <a:prstGeom prst="rect">
-            <a:avLst/>
-          </a:prstGeom>
-          <a:noFill/>
-          <a:ln/>
-        </p:spPr>
-        <p:txBody>
-          <a:bodyPr wrap="square" lIns="0" tIns="0" rIns="0" bIns="0" rtlCol="0" anchor="t"/>
-          <a:lstStyle/>
-          <a:p>
-            <a:pPr algn="l" indent="0" marL="0">
-              <a:lnSpc>
-                <a:spcPts val="1820"/>
-              </a:lnSpc>
-              <a:buNone/>
-            </a:pPr>
-            <a:r>
-              <a:rPr lang="en-US" sz="1400" dirty="0">
-                <a:solidFill>
-                  <a:srgbClr val="FFFFFF"/>
-                </a:solidFill>
-                <a:latin typeface="Courier New" pitchFamily="34" charset="0"/>
-                <a:ea typeface="Courier New" pitchFamily="34" charset="-122"/>
-                <a:cs typeface="Courier New" pitchFamily="34" charset="-120"/>
-              </a:rPr>
-              <a:t>shop[</a:t>
-            </a:r>
-            <a:pPr algn="l" indent="0" marL="0">
-              <a:lnSpc>
-                <a:spcPts val="1820"/>
-              </a:lnSpc>
-              <a:buNone/>
-            </a:pPr>
-            <a:r>
-              <a:rPr lang="en-US" sz="1400" dirty="0">
-                <a:solidFill>
-                  <a:srgbClr val="E0BE36"/>
-                </a:solidFill>
-                <a:latin typeface="Courier New" pitchFamily="34" charset="0"/>
-                <a:ea typeface="Courier New" pitchFamily="34" charset="-122"/>
-                <a:cs typeface="Courier New" pitchFamily="34" charset="-120"/>
-              </a:rPr>
-              <a:t>"revenue_ugx"</a:t>
-            </a:r>
-            <a:pPr algn="l" indent="0" marL="0">
-              <a:lnSpc>
-                <a:spcPts val="1820"/>
-              </a:lnSpc>
-              <a:buNone/>
-            </a:pPr>
-            <a:r>
-              <a:rPr lang="en-US" sz="1400" dirty="0">
-                <a:solidFill>
-                  <a:srgbClr val="FFFFFF"/>
-                </a:solidFill>
-                <a:latin typeface="Courier New" pitchFamily="34" charset="0"/>
-                <a:ea typeface="Courier New" pitchFamily="34" charset="-122"/>
-                <a:cs typeface="Courier New" pitchFamily="34" charset="-120"/>
-              </a:rPr>
-              <a:t>] = shop[</a:t>
-            </a:r>
-            <a:endParaRPr lang="en-US" sz="1400" dirty="0"/>
-          </a:p>
-          <a:p>
-            <a:pPr algn="l" indent="0" marL="0">
-              <a:lnSpc>
-                <a:spcPts val="1820"/>
-              </a:lnSpc>
-              <a:buNone/>
-            </a:pPr>
-            <a:r>
-              <a:rPr lang="en-US" sz="1400" dirty="0">
-                <a:solidFill>
-                  <a:srgbClr val="FFFFFF"/>
-                </a:solidFill>
-                <a:latin typeface="Courier New" pitchFamily="34" charset="0"/>
-                <a:ea typeface="Courier New" pitchFamily="34" charset="-122"/>
-                <a:cs typeface="Courier New" pitchFamily="34" charset="-120"/>
-              </a:rPr>
-              <a:t>    </a:t>
-            </a:r>
-            <a:pPr algn="l" indent="0" marL="0">
-              <a:lnSpc>
-                <a:spcPts val="1820"/>
-              </a:lnSpc>
-              <a:buNone/>
-            </a:pPr>
-            <a:r>
-              <a:rPr lang="en-US" sz="1400" dirty="0">
-                <a:solidFill>
-                  <a:srgbClr val="E0BE36"/>
-                </a:solidFill>
-                <a:latin typeface="Courier New" pitchFamily="34" charset="0"/>
-                <a:ea typeface="Courier New" pitchFamily="34" charset="-122"/>
-                <a:cs typeface="Courier New" pitchFamily="34" charset="-120"/>
-              </a:rPr>
-              <a:t>"units"</a:t>
-            </a:r>
-            <a:endParaRPr lang="en-US" sz="1400" dirty="0"/>
-          </a:p>
-          <a:p>
-            <a:pPr algn="l" indent="0" marL="0">
-              <a:lnSpc>
-                <a:spcPts val="1820"/>
-              </a:lnSpc>
-              <a:buNone/>
-            </a:pPr>
-            <a:r>
-              <a:rPr lang="en-US" sz="1400" dirty="0">
-                <a:solidFill>
-                  <a:srgbClr val="FFFFFF"/>
-                </a:solidFill>
-                <a:latin typeface="Courier New" pitchFamily="34" charset="0"/>
-                <a:ea typeface="Courier New" pitchFamily="34" charset="-122"/>
-                <a:cs typeface="Courier New" pitchFamily="34" charset="-120"/>
-              </a:rPr>
-              <a:t>] * shop[</a:t>
-            </a:r>
-            <a:pPr algn="l" indent="0" marL="0">
-              <a:lnSpc>
-                <a:spcPts val="1820"/>
-              </a:lnSpc>
-              <a:buNone/>
-            </a:pPr>
-            <a:r>
-              <a:rPr lang="en-US" sz="1400" dirty="0">
-                <a:solidFill>
-                  <a:srgbClr val="E0BE36"/>
-                </a:solidFill>
-                <a:latin typeface="Courier New" pitchFamily="34" charset="0"/>
-                <a:ea typeface="Courier New" pitchFamily="34" charset="-122"/>
-                <a:cs typeface="Courier New" pitchFamily="34" charset="-120"/>
-              </a:rPr>
-              <a:t>"unit_price_ugx"</a:t>
-            </a:r>
-            <a:pPr algn="l" indent="0" marL="0">
-              <a:lnSpc>
-                <a:spcPts val="1820"/>
-              </a:lnSpc>
-              <a:buNone/>
-            </a:pPr>
-            <a:r>
-              <a:rPr lang="en-US" sz="1400" dirty="0">
-                <a:solidFill>
-                  <a:srgbClr val="FFFFFF"/>
-                </a:solidFill>
-                <a:latin typeface="Courier New" pitchFamily="34" charset="0"/>
-                <a:ea typeface="Courier New" pitchFamily="34" charset="-122"/>
-                <a:cs typeface="Courier New" pitchFamily="34" charset="-120"/>
-              </a:rPr>
-              <a:t>]</a:t>
-            </a:r>
-            <a:endParaRPr lang="en-US" sz="1400" dirty="0"/>
-          </a:p>
-          <a:p>
-            <a:pPr algn="l" indent="0" marL="0">
-              <a:lnSpc>
-                <a:spcPts val="1820"/>
-              </a:lnSpc>
-              <a:buNone/>
-            </a:pPr>
-            <a:r>
-              <a:rPr lang="en-US" sz="1400" dirty="0">
-                <a:solidFill>
-                  <a:srgbClr val="FFFFFF"/>
-                </a:solidFill>
-                <a:latin typeface="Courier New" pitchFamily="34" charset="0"/>
-                <a:ea typeface="Courier New" pitchFamily="34" charset="-122"/>
-                <a:cs typeface="Courier New" pitchFamily="34" charset="-120"/>
-              </a:rPr>
-              <a:t>total_revenue = shop[</a:t>
-            </a:r>
-            <a:endParaRPr lang="en-US" sz="1400" dirty="0"/>
-          </a:p>
-          <a:p>
-            <a:pPr algn="l" indent="0" marL="0">
-              <a:lnSpc>
-                <a:spcPts val="1820"/>
-              </a:lnSpc>
-              <a:buNone/>
-            </a:pPr>
-            <a:r>
-              <a:rPr lang="en-US" sz="1400" dirty="0">
-                <a:solidFill>
-                  <a:srgbClr val="FFFFFF"/>
-                </a:solidFill>
-                <a:latin typeface="Courier New" pitchFamily="34" charset="0"/>
-                <a:ea typeface="Courier New" pitchFamily="34" charset="-122"/>
-                <a:cs typeface="Courier New" pitchFamily="34" charset="-120"/>
-              </a:rPr>
-              <a:t>    </a:t>
-            </a:r>
-            <a:pPr algn="l" indent="0" marL="0">
-              <a:lnSpc>
-                <a:spcPts val="1820"/>
-              </a:lnSpc>
-              <a:buNone/>
-            </a:pPr>
-            <a:r>
-              <a:rPr lang="en-US" sz="1400" dirty="0">
-                <a:solidFill>
-                  <a:srgbClr val="E0BE36"/>
-                </a:solidFill>
-                <a:latin typeface="Courier New" pitchFamily="34" charset="0"/>
-                <a:ea typeface="Courier New" pitchFamily="34" charset="-122"/>
-                <a:cs typeface="Courier New" pitchFamily="34" charset="-120"/>
-              </a:rPr>
-              <a:t>"revenue_ugx"</a:t>
-            </a:r>
-            <a:endParaRPr lang="en-US" sz="1400" dirty="0"/>
-          </a:p>
-          <a:p>
-            <a:pPr algn="l" indent="0" marL="0">
-              <a:lnSpc>
-                <a:spcPts val="1820"/>
-              </a:lnSpc>
-              <a:buNone/>
-            </a:pPr>
-            <a:r>
-              <a:rPr lang="en-US" sz="1400" dirty="0">
-                <a:solidFill>
-                  <a:srgbClr val="FFFFFF"/>
-                </a:solidFill>
-                <a:latin typeface="Courier New" pitchFamily="34" charset="0"/>
-                <a:ea typeface="Courier New" pitchFamily="34" charset="-122"/>
-                <a:cs typeface="Courier New" pitchFamily="34" charset="-120"/>
-              </a:rPr>
-              <a:t>].sum()</a:t>
-            </a:r>
-            <a:endParaRPr lang="en-US" sz="1400" dirty="0"/>
-          </a:p>
-          <a:p>
-            <a:pPr algn="l" indent="0" marL="0">
-              <a:lnSpc>
-                <a:spcPts val="1820"/>
-              </a:lnSpc>
-              <a:buNone/>
-            </a:pPr>
-            <a:r>
-              <a:rPr lang="en-US" sz="1400" dirty="0">
-                <a:solidFill>
-                  <a:srgbClr val="FFFFFF"/>
-                </a:solidFill>
-                <a:latin typeface="Courier New" pitchFamily="34" charset="0"/>
-                <a:ea typeface="Courier New" pitchFamily="34" charset="-122"/>
-                <a:cs typeface="Courier New" pitchFamily="34" charset="-120"/>
-              </a:rPr>
-              <a:t>by_item = shop.groupby(</a:t>
-            </a:r>
-            <a:pPr algn="l" indent="0" marL="0">
-              <a:lnSpc>
-                <a:spcPts val="1820"/>
-              </a:lnSpc>
-              <a:buNone/>
-            </a:pPr>
-            <a:r>
-              <a:rPr lang="en-US" sz="1400" dirty="0">
-                <a:solidFill>
-                  <a:srgbClr val="E0BE36"/>
-                </a:solidFill>
-                <a:latin typeface="Courier New" pitchFamily="34" charset="0"/>
-                <a:ea typeface="Courier New" pitchFamily="34" charset="-122"/>
-                <a:cs typeface="Courier New" pitchFamily="34" charset="-120"/>
-              </a:rPr>
-              <a:t>"item"</a:t>
-            </a:r>
-            <a:pPr algn="l" indent="0" marL="0">
-              <a:lnSpc>
-                <a:spcPts val="1820"/>
-              </a:lnSpc>
-              <a:buNone/>
-            </a:pPr>
-            <a:r>
-              <a:rPr lang="en-US" sz="1400" dirty="0">
-                <a:solidFill>
-                  <a:srgbClr val="FFFFFF"/>
-                </a:solidFill>
-                <a:latin typeface="Courier New" pitchFamily="34" charset="0"/>
-                <a:ea typeface="Courier New" pitchFamily="34" charset="-122"/>
-                <a:cs typeface="Courier New" pitchFamily="34" charset="-120"/>
-              </a:rPr>
-              <a:t>)[</a:t>
-            </a:r>
-            <a:endParaRPr lang="en-US" sz="1400" dirty="0"/>
-          </a:p>
-          <a:p>
-            <a:pPr algn="l" indent="0" marL="0">
-              <a:lnSpc>
-                <a:spcPts val="1820"/>
-              </a:lnSpc>
-              <a:buNone/>
-            </a:pPr>
-            <a:r>
-              <a:rPr lang="en-US" sz="1400" dirty="0">
-                <a:solidFill>
-                  <a:srgbClr val="FFFFFF"/>
-                </a:solidFill>
-                <a:latin typeface="Courier New" pitchFamily="34" charset="0"/>
-                <a:ea typeface="Courier New" pitchFamily="34" charset="-122"/>
-                <a:cs typeface="Courier New" pitchFamily="34" charset="-120"/>
-              </a:rPr>
-              <a:t>    </a:t>
-            </a:r>
-            <a:pPr algn="l" indent="0" marL="0">
-              <a:lnSpc>
-                <a:spcPts val="1820"/>
-              </a:lnSpc>
-              <a:buNone/>
-            </a:pPr>
-            <a:r>
-              <a:rPr lang="en-US" sz="1400" dirty="0">
-                <a:solidFill>
-                  <a:srgbClr val="E0BE36"/>
-                </a:solidFill>
-                <a:latin typeface="Courier New" pitchFamily="34" charset="0"/>
-                <a:ea typeface="Courier New" pitchFamily="34" charset="-122"/>
-                <a:cs typeface="Courier New" pitchFamily="34" charset="-120"/>
-              </a:rPr>
-              <a:t>"revenue_ugx"</a:t>
-            </a:r>
-            <a:endParaRPr lang="en-US" sz="1400" dirty="0"/>
-          </a:p>
-          <a:p>
-            <a:pPr algn="l" indent="0" marL="0">
-              <a:lnSpc>
-                <a:spcPts val="1820"/>
-              </a:lnSpc>
-              <a:buNone/>
-            </a:pPr>
-            <a:r>
-              <a:rPr lang="en-US" sz="1400" dirty="0">
-                <a:solidFill>
-                  <a:srgbClr val="FFFFFF"/>
-                </a:solidFill>
-                <a:latin typeface="Courier New" pitchFamily="34" charset="0"/>
-                <a:ea typeface="Courier New" pitchFamily="34" charset="-122"/>
-                <a:cs typeface="Courier New" pitchFamily="34" charset="-120"/>
-              </a:rPr>
-              <a:t>].sum()</a:t>
-            </a:r>
-            <a:endParaRPr lang="en-US" sz="1400" dirty="0"/>
-          </a:p>
-          <a:p>
-            <a:pPr algn="l" indent="0" marL="0">
-              <a:lnSpc>
-                <a:spcPts val="1820"/>
-              </a:lnSpc>
-              <a:buNone/>
-            </a:pPr>
-            <a:r>
-              <a:rPr lang="en-US" sz="1400" dirty="0">
-                <a:solidFill>
-                  <a:srgbClr val="FFFFFF"/>
-                </a:solidFill>
-                <a:latin typeface="Courier New" pitchFamily="34" charset="0"/>
-                <a:ea typeface="Courier New" pitchFamily="34" charset="-122"/>
-                <a:cs typeface="Courier New" pitchFamily="34" charset="-120"/>
-              </a:rPr>
-              <a:t>print(total_revenue)</a:t>
-            </a:r>
-            <a:endParaRPr lang="en-US" sz="1400" dirty="0"/>
-          </a:p>
-          <a:p>
-            <a:pPr algn="l" indent="0" marL="0">
-              <a:lnSpc>
-                <a:spcPts val="1820"/>
-              </a:lnSpc>
-              <a:buNone/>
-            </a:pPr>
-            <a:r>
-              <a:rPr lang="en-US" sz="1400" dirty="0">
-                <a:solidFill>
-                  <a:srgbClr val="FFFFFF"/>
-                </a:solidFill>
-                <a:latin typeface="Courier New" pitchFamily="34" charset="0"/>
-                <a:ea typeface="Courier New" pitchFamily="34" charset="-122"/>
-                <a:cs typeface="Courier New" pitchFamily="34" charset="-120"/>
-              </a:rPr>
-              <a:t>print(by_item)</a:t>
-            </a:r>
-            <a:endParaRPr lang="en-US" sz="1400" dirty="0"/>
-          </a:p>
-        </p:txBody>
-      </p:sp>
-      <p:sp>
-        <p:nvSpPr>
-          <p:cNvPr id="5" name="Text 3"/>
-          <p:cNvSpPr txBox="1"/>
-          <p:nvPr/>
-        </p:nvSpPr>
-        <p:spPr>
-          <a:xfrm>
             <a:off x="640080" y="1737360"/>
-            <a:ext cx="6400800" cy="4389120"/>
+            <a:ext cx="8961120" cy="4389120"/>
           </a:xfrm>
           <a:prstGeom prst="rect">
             <a:avLst/>
@@ -6411,423 +6035,30 @@
           </a:p>
         </p:txBody>
       </p:sp>
-      <p:sp>
-        <p:nvSpPr>
-          <p:cNvPr id="4" name="Shape 2"/>
-          <p:cNvSpPr/>
+      <p:pic>
+        <p:nvPicPr>
+          <p:cNvPr id="4" name="Image 0" descr="Change one thing">    </p:cNvPr>
+          <p:cNvPicPr>
+            <a:picLocks noChangeAspect="1"/>
+          </p:cNvPicPr>
           <p:nvPr/>
-        </p:nvSpPr>
-        <p:spPr>
-          <a:xfrm>
-            <a:off x="7223760" y="1737360"/>
-            <a:ext cx="4297680" cy="3163062"/>
-          </a:xfrm>
-          <a:prstGeom prst="roundRect">
-            <a:avLst>
-              <a:gd name="adj" fmla="val 2313"/>
-            </a:avLst>
-          </a:prstGeom>
-          <a:solidFill>
-            <a:srgbClr val="111111"/>
-          </a:solidFill>
-          <a:ln/>
-        </p:spPr>
-      </p:sp>
-      <p:sp>
-        <p:nvSpPr>
-          <p:cNvPr id="5" name="Text 3"/>
-          <p:cNvSpPr txBox="1"/>
-          <p:nvPr/>
-        </p:nvSpPr>
-        <p:spPr>
-          <a:xfrm>
-            <a:off x="7424928" y="1938528"/>
-            <a:ext cx="3895344" cy="2760726"/>
-          </a:xfrm>
-          <a:prstGeom prst="rect">
-            <a:avLst/>
-          </a:prstGeom>
-          <a:noFill/>
-          <a:ln/>
-        </p:spPr>
-        <p:txBody>
-          <a:bodyPr wrap="square" lIns="0" tIns="0" rIns="0" bIns="0" rtlCol="0" anchor="t"/>
-          <a:lstStyle/>
-          <a:p>
-            <a:pPr algn="l" indent="0" marL="0">
-              <a:lnSpc>
-                <a:spcPts val="1950"/>
-              </a:lnSpc>
-              <a:buNone/>
-            </a:pPr>
-            <a:r>
-              <a:rPr lang="en-US" sz="1500" dirty="0">
-                <a:solidFill>
-                  <a:srgbClr val="FFFFFF"/>
-                </a:solidFill>
-                <a:latin typeface="Courier New" pitchFamily="34" charset="0"/>
-                <a:ea typeface="Courier New" pitchFamily="34" charset="-122"/>
-                <a:cs typeface="Courier New" pitchFamily="34" charset="-120"/>
-              </a:rPr>
-              <a:t>shop[</a:t>
-            </a:r>
-            <a:pPr algn="l" indent="0" marL="0">
-              <a:lnSpc>
-                <a:spcPts val="1950"/>
-              </a:lnSpc>
-              <a:buNone/>
-            </a:pPr>
-            <a:r>
-              <a:rPr lang="en-US" sz="1500" dirty="0">
-                <a:solidFill>
-                  <a:srgbClr val="E0BE36"/>
-                </a:solidFill>
-                <a:latin typeface="Courier New" pitchFamily="34" charset="0"/>
-                <a:ea typeface="Courier New" pitchFamily="34" charset="-122"/>
-                <a:cs typeface="Courier New" pitchFamily="34" charset="-120"/>
-              </a:rPr>
-              <a:t>"revenue_ugx"</a:t>
-            </a:r>
-            <a:pPr algn="l" indent="0" marL="0">
-              <a:lnSpc>
-                <a:spcPts val="1950"/>
-              </a:lnSpc>
-              <a:buNone/>
-            </a:pPr>
-            <a:r>
-              <a:rPr lang="en-US" sz="1500" dirty="0">
-                <a:solidFill>
-                  <a:srgbClr val="FFFFFF"/>
-                </a:solidFill>
-                <a:latin typeface="Courier New" pitchFamily="34" charset="0"/>
-                <a:ea typeface="Courier New" pitchFamily="34" charset="-122"/>
-                <a:cs typeface="Courier New" pitchFamily="34" charset="-120"/>
-              </a:rPr>
-              <a:t>] = shop[</a:t>
-            </a:r>
-            <a:endParaRPr lang="en-US" sz="1500" dirty="0"/>
-          </a:p>
-          <a:p>
-            <a:pPr algn="l" indent="0" marL="0">
-              <a:lnSpc>
-                <a:spcPts val="1950"/>
-              </a:lnSpc>
-              <a:buNone/>
-            </a:pPr>
-            <a:r>
-              <a:rPr lang="en-US" sz="1500" dirty="0">
-                <a:solidFill>
-                  <a:srgbClr val="FFFFFF"/>
-                </a:solidFill>
-                <a:latin typeface="Courier New" pitchFamily="34" charset="0"/>
-                <a:ea typeface="Courier New" pitchFamily="34" charset="-122"/>
-                <a:cs typeface="Courier New" pitchFamily="34" charset="-120"/>
-              </a:rPr>
-              <a:t>    </a:t>
-            </a:r>
-            <a:pPr algn="l" indent="0" marL="0">
-              <a:lnSpc>
-                <a:spcPts val="1950"/>
-              </a:lnSpc>
-              <a:buNone/>
-            </a:pPr>
-            <a:r>
-              <a:rPr lang="en-US" sz="1500" dirty="0">
-                <a:solidFill>
-                  <a:srgbClr val="E0BE36"/>
-                </a:solidFill>
-                <a:latin typeface="Courier New" pitchFamily="34" charset="0"/>
-                <a:ea typeface="Courier New" pitchFamily="34" charset="-122"/>
-                <a:cs typeface="Courier New" pitchFamily="34" charset="-120"/>
-              </a:rPr>
-              <a:t>"units"</a:t>
-            </a:r>
-            <a:endParaRPr lang="en-US" sz="1500" dirty="0"/>
-          </a:p>
-          <a:p>
-            <a:pPr algn="l" indent="0" marL="0">
-              <a:lnSpc>
-                <a:spcPts val="1950"/>
-              </a:lnSpc>
-              <a:buNone/>
-            </a:pPr>
-            <a:r>
-              <a:rPr lang="en-US" sz="1500" dirty="0">
-                <a:solidFill>
-                  <a:srgbClr val="FFFFFF"/>
-                </a:solidFill>
-                <a:latin typeface="Courier New" pitchFamily="34" charset="0"/>
-                <a:ea typeface="Courier New" pitchFamily="34" charset="-122"/>
-                <a:cs typeface="Courier New" pitchFamily="34" charset="-120"/>
-              </a:rPr>
-              <a:t>] * shop[</a:t>
-            </a:r>
-            <a:pPr algn="l" indent="0" marL="0">
-              <a:lnSpc>
-                <a:spcPts val="1950"/>
-              </a:lnSpc>
-              <a:buNone/>
-            </a:pPr>
-            <a:r>
-              <a:rPr lang="en-US" sz="1500" dirty="0">
-                <a:solidFill>
-                  <a:srgbClr val="E0BE36"/>
-                </a:solidFill>
-                <a:latin typeface="Courier New" pitchFamily="34" charset="0"/>
-                <a:ea typeface="Courier New" pitchFamily="34" charset="-122"/>
-                <a:cs typeface="Courier New" pitchFamily="34" charset="-120"/>
-              </a:rPr>
-              <a:t>"unit_price_ugx"</a:t>
-            </a:r>
-            <a:pPr algn="l" indent="0" marL="0">
-              <a:lnSpc>
-                <a:spcPts val="1950"/>
-              </a:lnSpc>
-              <a:buNone/>
-            </a:pPr>
-            <a:r>
-              <a:rPr lang="en-US" sz="1500" dirty="0">
-                <a:solidFill>
-                  <a:srgbClr val="FFFFFF"/>
-                </a:solidFill>
-                <a:latin typeface="Courier New" pitchFamily="34" charset="0"/>
-                <a:ea typeface="Courier New" pitchFamily="34" charset="-122"/>
-                <a:cs typeface="Courier New" pitchFamily="34" charset="-120"/>
-              </a:rPr>
-              <a:t>]</a:t>
-            </a:r>
-            <a:endParaRPr lang="en-US" sz="1500" dirty="0"/>
-          </a:p>
-          <a:p>
-            <a:pPr algn="l" indent="0" marL="0">
-              <a:lnSpc>
-                <a:spcPts val="1950"/>
-              </a:lnSpc>
-              <a:buNone/>
-            </a:pPr>
-            <a:r>
-              <a:rPr lang="en-US" sz="1500" dirty="0">
-                <a:solidFill>
-                  <a:srgbClr val="FFFFFF"/>
-                </a:solidFill>
-                <a:latin typeface="Courier New" pitchFamily="34" charset="0"/>
-                <a:ea typeface="Courier New" pitchFamily="34" charset="-122"/>
-                <a:cs typeface="Courier New" pitchFamily="34" charset="-120"/>
-              </a:rPr>
-              <a:t>total_revenue = shop[</a:t>
-            </a:r>
-            <a:endParaRPr lang="en-US" sz="1500" dirty="0"/>
-          </a:p>
-          <a:p>
-            <a:pPr algn="l" indent="0" marL="0">
-              <a:lnSpc>
-                <a:spcPts val="1950"/>
-              </a:lnSpc>
-              <a:buNone/>
-            </a:pPr>
-            <a:r>
-              <a:rPr lang="en-US" sz="1500" dirty="0">
-                <a:solidFill>
-                  <a:srgbClr val="FFFFFF"/>
-                </a:solidFill>
-                <a:latin typeface="Courier New" pitchFamily="34" charset="0"/>
-                <a:ea typeface="Courier New" pitchFamily="34" charset="-122"/>
-                <a:cs typeface="Courier New" pitchFamily="34" charset="-120"/>
-              </a:rPr>
-              <a:t>    </a:t>
-            </a:r>
-            <a:pPr algn="l" indent="0" marL="0">
-              <a:lnSpc>
-                <a:spcPts val="1950"/>
-              </a:lnSpc>
-              <a:buNone/>
-            </a:pPr>
-            <a:r>
-              <a:rPr lang="en-US" sz="1500" dirty="0">
-                <a:solidFill>
-                  <a:srgbClr val="E0BE36"/>
-                </a:solidFill>
-                <a:latin typeface="Courier New" pitchFamily="34" charset="0"/>
-                <a:ea typeface="Courier New" pitchFamily="34" charset="-122"/>
-                <a:cs typeface="Courier New" pitchFamily="34" charset="-120"/>
-              </a:rPr>
-              <a:t>"revenue_ugx"</a:t>
-            </a:r>
-            <a:endParaRPr lang="en-US" sz="1500" dirty="0"/>
-          </a:p>
-          <a:p>
-            <a:pPr algn="l" indent="0" marL="0">
-              <a:lnSpc>
-                <a:spcPts val="1950"/>
-              </a:lnSpc>
-              <a:buNone/>
-            </a:pPr>
-            <a:r>
-              <a:rPr lang="en-US" sz="1500" dirty="0">
-                <a:solidFill>
-                  <a:srgbClr val="FFFFFF"/>
-                </a:solidFill>
-                <a:latin typeface="Courier New" pitchFamily="34" charset="0"/>
-                <a:ea typeface="Courier New" pitchFamily="34" charset="-122"/>
-                <a:cs typeface="Courier New" pitchFamily="34" charset="-120"/>
-              </a:rPr>
-              <a:t>].sum()</a:t>
-            </a:r>
-            <a:endParaRPr lang="en-US" sz="1500" dirty="0"/>
-          </a:p>
-          <a:p>
-            <a:pPr algn="l" indent="0" marL="0">
-              <a:lnSpc>
-                <a:spcPts val="1950"/>
-              </a:lnSpc>
-              <a:buNone/>
-            </a:pPr>
-            <a:r>
-              <a:rPr lang="en-US" sz="1500" dirty="0">
-                <a:solidFill>
-                  <a:srgbClr val="FFFFFF"/>
-                </a:solidFill>
-                <a:latin typeface="Courier New" pitchFamily="34" charset="0"/>
-                <a:ea typeface="Courier New" pitchFamily="34" charset="-122"/>
-                <a:cs typeface="Courier New" pitchFamily="34" charset="-120"/>
-              </a:rPr>
-              <a:t>by_item = shop.groupby(</a:t>
-            </a:r>
-            <a:pPr algn="l" indent="0" marL="0">
-              <a:lnSpc>
-                <a:spcPts val="1950"/>
-              </a:lnSpc>
-              <a:buNone/>
-            </a:pPr>
-            <a:r>
-              <a:rPr lang="en-US" sz="1500" dirty="0">
-                <a:solidFill>
-                  <a:srgbClr val="E0BE36"/>
-                </a:solidFill>
-                <a:latin typeface="Courier New" pitchFamily="34" charset="0"/>
-                <a:ea typeface="Courier New" pitchFamily="34" charset="-122"/>
-                <a:cs typeface="Courier New" pitchFamily="34" charset="-120"/>
-              </a:rPr>
-              <a:t>"item"</a:t>
-            </a:r>
-            <a:pPr algn="l" indent="0" marL="0">
-              <a:lnSpc>
-                <a:spcPts val="1950"/>
-              </a:lnSpc>
-              <a:buNone/>
-            </a:pPr>
-            <a:r>
-              <a:rPr lang="en-US" sz="1500" dirty="0">
-                <a:solidFill>
-                  <a:srgbClr val="FFFFFF"/>
-                </a:solidFill>
-                <a:latin typeface="Courier New" pitchFamily="34" charset="0"/>
-                <a:ea typeface="Courier New" pitchFamily="34" charset="-122"/>
-                <a:cs typeface="Courier New" pitchFamily="34" charset="-120"/>
-              </a:rPr>
-              <a:t>)[</a:t>
-            </a:r>
-            <a:endParaRPr lang="en-US" sz="1500" dirty="0"/>
-          </a:p>
-          <a:p>
-            <a:pPr algn="l" indent="0" marL="0">
-              <a:lnSpc>
-                <a:spcPts val="1950"/>
-              </a:lnSpc>
-              <a:buNone/>
-            </a:pPr>
-            <a:r>
-              <a:rPr lang="en-US" sz="1500" dirty="0">
-                <a:solidFill>
-                  <a:srgbClr val="FFFFFF"/>
-                </a:solidFill>
-                <a:latin typeface="Courier New" pitchFamily="34" charset="0"/>
-                <a:ea typeface="Courier New" pitchFamily="34" charset="-122"/>
-                <a:cs typeface="Courier New" pitchFamily="34" charset="-120"/>
-              </a:rPr>
-              <a:t>    </a:t>
-            </a:r>
-            <a:pPr algn="l" indent="0" marL="0">
-              <a:lnSpc>
-                <a:spcPts val="1950"/>
-              </a:lnSpc>
-              <a:buNone/>
-            </a:pPr>
-            <a:r>
-              <a:rPr lang="en-US" sz="1500" dirty="0">
-                <a:solidFill>
-                  <a:srgbClr val="E0BE36"/>
-                </a:solidFill>
-                <a:latin typeface="Courier New" pitchFamily="34" charset="0"/>
-                <a:ea typeface="Courier New" pitchFamily="34" charset="-122"/>
-                <a:cs typeface="Courier New" pitchFamily="34" charset="-120"/>
-              </a:rPr>
-              <a:t>"revenue_ugx"</a:t>
-            </a:r>
-            <a:endParaRPr lang="en-US" sz="1500" dirty="0"/>
-          </a:p>
-          <a:p>
-            <a:pPr algn="l" indent="0" marL="0">
-              <a:lnSpc>
-                <a:spcPts val="1950"/>
-              </a:lnSpc>
-              <a:buNone/>
-            </a:pPr>
-            <a:r>
-              <a:rPr lang="en-US" sz="1500" dirty="0">
-                <a:solidFill>
-                  <a:srgbClr val="FFFFFF"/>
-                </a:solidFill>
-                <a:latin typeface="Courier New" pitchFamily="34" charset="0"/>
-                <a:ea typeface="Courier New" pitchFamily="34" charset="-122"/>
-                <a:cs typeface="Courier New" pitchFamily="34" charset="-120"/>
-              </a:rPr>
-              <a:t>].sum()</a:t>
-            </a:r>
-            <a:endParaRPr lang="en-US" sz="1500" dirty="0"/>
-          </a:p>
-          <a:p>
-            <a:pPr algn="l" indent="0" marL="0">
-              <a:lnSpc>
-                <a:spcPts val="1950"/>
-              </a:lnSpc>
-              <a:buNone/>
-            </a:pPr>
-            <a:r>
-              <a:rPr lang="en-US" sz="1500" dirty="0">
-                <a:solidFill>
-                  <a:srgbClr val="FFFFFF"/>
-                </a:solidFill>
-                <a:latin typeface="Courier New" pitchFamily="34" charset="0"/>
-                <a:ea typeface="Courier New" pitchFamily="34" charset="-122"/>
-                <a:cs typeface="Courier New" pitchFamily="34" charset="-120"/>
-              </a:rPr>
-              <a:t>print(total_revenue)</a:t>
-            </a:r>
-            <a:endParaRPr lang="en-US" sz="1500" dirty="0"/>
-          </a:p>
-          <a:p>
-            <a:pPr algn="l" indent="0" marL="0">
-              <a:lnSpc>
-                <a:spcPts val="1950"/>
-              </a:lnSpc>
-              <a:buNone/>
-            </a:pPr>
-            <a:r>
-              <a:rPr lang="en-US" sz="1500" dirty="0">
-                <a:solidFill>
-                  <a:srgbClr val="FFFFFF"/>
-                </a:solidFill>
-                <a:latin typeface="Courier New" pitchFamily="34" charset="0"/>
-                <a:ea typeface="Courier New" pitchFamily="34" charset="-122"/>
-                <a:cs typeface="Courier New" pitchFamily="34" charset="-120"/>
-              </a:rPr>
-              <a:t>print(by_item)</a:t>
-            </a:r>
-            <a:endParaRPr lang="en-US" sz="1500" dirty="0"/>
-          </a:p>
-        </p:txBody>
-      </p:sp>
+        </p:nvPicPr>
+        <p:blipFill>
+          <a:blip r:embed="rId1"/>
+          <a:stretch>
+            <a:fillRect/>
+          </a:stretch>
+        </p:blipFill>
+        <p:spPr>
+          <a:xfrm>
+            <a:off x="9418320" y="2103120"/>
+            <a:ext cx="1828800" cy="1828800"/>
+          </a:xfrm>
+          <a:prstGeom prst="rect">
+            <a:avLst/>
+          </a:prstGeom>
+        </p:spPr>
+      </p:pic>
       <p:sp>
         <p:nvSpPr>
           <p:cNvPr id="25" name="Slide Number Placeholder 0"/>
@@ -7366,15 +6597,15 @@
           <a:p>
             <a:pPr algn="l" indent="0" marL="0">
               <a:lnSpc>
-                <a:spcPts val="3600"/>
+                <a:spcPts val="3360"/>
               </a:lnSpc>
               <a:spcAft>
-                <a:spcPts val="2520"/>
+                <a:spcPts val="2020"/>
               </a:spcAft>
               <a:buNone/>
             </a:pPr>
             <a:r>
-              <a:rPr lang="en-US" sz="3000" dirty="0">
+              <a:rPr lang="en-US" sz="2800" dirty="0">
                 <a:solidFill>
                   <a:srgbClr val="111111"/>
                 </a:solidFill>
@@ -7382,22 +6613,22 @@
                 <a:ea typeface="Lato" pitchFamily="34" charset="-122"/>
                 <a:cs typeface="Lato" pitchFamily="34" charset="-120"/>
               </a:rPr>
-              <a:t>Keep the rows with units of at least 3. Calculate the total units and the mean units per row. Say why these two numbers are different quantities.</a:t>
-            </a:r>
-            <a:endParaRPr lang="en-US" sz="3000" dirty="0"/>
-          </a:p>
-          <a:p>
-            <a:pPr algn="l" indent="0" marL="0">
-              <a:lnSpc>
-                <a:spcPts val="3600"/>
+              <a:t>Keep the rows with units of at least 3.</a:t>
+            </a:r>
+            <a:endParaRPr lang="en-US" sz="2800" dirty="0"/>
+          </a:p>
+          <a:p>
+            <a:pPr algn="l" indent="0" marL="0">
+              <a:lnSpc>
+                <a:spcPts val="3360"/>
               </a:lnSpc>
               <a:spcAft>
-                <a:spcPts val="2520"/>
+                <a:spcPts val="2020"/>
               </a:spcAft>
               <a:buNone/>
             </a:pPr>
             <a:r>
-              <a:rPr lang="en-US" sz="3000" dirty="0">
+              <a:rPr lang="en-US" sz="2800" dirty="0">
                 <a:solidFill>
                   <a:srgbClr val="111111"/>
                 </a:solidFill>
@@ -7405,9 +6636,55 @@
                 <a:ea typeface="Lato" pitchFamily="34" charset="-122"/>
                 <a:cs typeface="Lato" pitchFamily="34" charset="-120"/>
               </a:rPr>
+              <a:t>Calculate the total units and the mean units per row.</a:t>
+            </a:r>
+            <a:endParaRPr lang="en-US" sz="2800" dirty="0"/>
+          </a:p>
+          <a:p>
+            <a:pPr algn="l" indent="0" marL="0">
+              <a:lnSpc>
+                <a:spcPts val="3360"/>
+              </a:lnSpc>
+              <a:spcAft>
+                <a:spcPts val="2020"/>
+              </a:spcAft>
+              <a:buNone/>
+            </a:pPr>
+            <a:r>
+              <a:rPr lang="en-US" sz="2800" dirty="0">
+                <a:solidFill>
+                  <a:srgbClr val="111111"/>
+                </a:solidFill>
+                <a:latin typeface="Lato" pitchFamily="34" charset="0"/>
+                <a:ea typeface="Lato" pitchFamily="34" charset="-122"/>
+                <a:cs typeface="Lato" pitchFamily="34" charset="-120"/>
+              </a:rPr>
+              <a:t>Say why these two numbers are different quantities.</a:t>
+            </a:r>
+            <a:endParaRPr lang="en-US" sz="2800" dirty="0"/>
+          </a:p>
+          <a:p>
+            <a:pPr algn="l" indent="0" marL="0">
+              <a:lnSpc>
+                <a:spcPts val="3360"/>
+              </a:lnSpc>
+              <a:spcAft>
+                <a:spcPts val="2020"/>
+              </a:spcAft>
+              <a:buNone/>
+            </a:pPr>
+            <a:r>
+              <a:rPr lang="en-US" sz="2800" dirty="0">
+                <a:solidFill>
+                  <a:srgbClr val="111111"/>
+                </a:solidFill>
+                <a:latin typeface="Lato" pitchFamily="34" charset="0"/>
+                <a:ea typeface="Lato" pitchFamily="34" charset="-122"/>
+                <a:cs typeface="Lato" pitchFamily="34" charset="-120"/>
+              </a:rPr>
               <a:t>Save it as ML08. Write two sentences: what you changed and how you checked it.</a:t>
             </a:r>
-            <a:endParaRPr lang="en-US" sz="3000" dirty="0"/>
+            <a:endParaRPr lang="en-US" sz="2800" dirty="0"/>
           </a:p>
         </p:txBody>
       </p:sp>
